--- a/egitim/dosyalar/Sunum-Sablonu-Cerceve-11.pptx
+++ b/egitim/dosyalar/Sunum-Sablonu-Cerceve-11.pptx
@@ -3830,7 +3830,7 @@
 </p:sld>
 </file>
 
-<file path=ppt/slides/slide12.xml><?xml version="1.0" encoding="utf-8"?>
+<file path=ppt/slides/slide2.xml><?xml version="1.0" encoding="utf-8"?>
 <p:sld xmlns:a="http://schemas.openxmlformats.org/drawingml/2006/main" xmlns:p="http://schemas.openxmlformats.org/presentationml/2006/main" xmlns:r="http://schemas.openxmlformats.org/officeDocument/2006/relationships">
   <p:cSld>
     <p:bg>
@@ -4049,7 +4049,7 @@
 </p:sld>
 </file>
 
-<file path=ppt/slides/slide13.xml><?xml version="1.0" encoding="utf-8"?>
+<file path=ppt/slides/slide3.xml><?xml version="1.0" encoding="utf-8"?>
 <p:sld xmlns:a="http://schemas.openxmlformats.org/drawingml/2006/main" xmlns:p="http://schemas.openxmlformats.org/presentationml/2006/main" xmlns:r="http://schemas.openxmlformats.org/officeDocument/2006/relationships">
   <p:cSld>
     <p:bg>
